--- a/Lab Materials/Day 1 - Lab Materials/Activity 1/01_cleaning.pptx
+++ b/Lab Materials/Day 1 - Lab Materials/Activity 1/01_cleaning.pptx
@@ -135,6 +135,7 @@
 <file path=ppt/revisionInfo.xml><?xml version="1.0" encoding="utf-8"?>
 <p1510:revInfo xmlns:a="http://schemas.openxmlformats.org/drawingml/2006/main" xmlns:r="http://schemas.openxmlformats.org/officeDocument/2006/relationships" xmlns:p1510="http://schemas.microsoft.com/office/powerpoint/2015/10/main">
   <p1510:revLst>
+    <p1510:client id="{09C23A66-2653-4861-BDA2-D841B843673E}" v="7" dt="2026-07-19T04:36:26.387"/>
     <p1510:client id="{48DB55CD-849A-4F60-B88C-613FB3B6ECA4}" v="504" dt="2026-07-18T20:57:40.209"/>
   </p1510:revLst>
 </p1510:revInfo>
@@ -145,7 +146,7 @@
   <pc:docChgLst>
     <pc:chgData name="ambleic@clemson.edu" userId="43615028507_tp_box_2" providerId="OAuth2" clId="{5F4B9ABB-DEB5-4DC3-A8F9-1752A2D02C85}"/>
     <pc:docChg chg="undo custSel addSld delSld modSld sldOrd">
-      <pc:chgData name="ambleic@clemson.edu" userId="43615028507_tp_box_2" providerId="OAuth2" clId="{5F4B9ABB-DEB5-4DC3-A8F9-1752A2D02C85}" dt="2026-07-18T20:57:40.209" v="1022" actId="20577"/>
+      <pc:chgData name="ambleic@clemson.edu" userId="43615028507_tp_box_2" providerId="OAuth2" clId="{5F4B9ABB-DEB5-4DC3-A8F9-1752A2D02C85}" dt="2026-07-19T04:36:26.387" v="1088" actId="20577"/>
       <pc:docMkLst>
         <pc:docMk/>
       </pc:docMkLst>
@@ -341,7 +342,7 @@
         </pc:spChg>
       </pc:sldChg>
       <pc:sldChg chg="modSp mod modNotesTx">
-        <pc:chgData name="ambleic@clemson.edu" userId="43615028507_tp_box_2" providerId="OAuth2" clId="{5F4B9ABB-DEB5-4DC3-A8F9-1752A2D02C85}" dt="2026-07-18T20:57:40.209" v="1022" actId="20577"/>
+        <pc:chgData name="ambleic@clemson.edu" userId="43615028507_tp_box_2" providerId="OAuth2" clId="{5F4B9ABB-DEB5-4DC3-A8F9-1752A2D02C85}" dt="2026-07-19T04:36:26.387" v="1088" actId="20577"/>
         <pc:sldMkLst>
           <pc:docMk/>
           <pc:sldMk cId="0" sldId="276"/>
@@ -355,7 +356,7 @@
           </ac:spMkLst>
         </pc:spChg>
         <pc:spChg chg="mod">
-          <ac:chgData name="ambleic@clemson.edu" userId="43615028507_tp_box_2" providerId="OAuth2" clId="{5F4B9ABB-DEB5-4DC3-A8F9-1752A2D02C85}" dt="2026-07-18T20:56:33.003" v="1015" actId="207"/>
+          <ac:chgData name="ambleic@clemson.edu" userId="43615028507_tp_box_2" providerId="OAuth2" clId="{5F4B9ABB-DEB5-4DC3-A8F9-1752A2D02C85}" dt="2026-07-19T04:36:26.387" v="1088" actId="20577"/>
           <ac:spMkLst>
             <pc:docMk/>
             <pc:sldMk cId="0" sldId="276"/>
@@ -417,6 +418,21 @@
           <pc:sldMk cId="3159209876" sldId="308"/>
         </pc:sldMkLst>
       </pc:sldChg>
+      <pc:sldChg chg="modSp mod">
+        <pc:chgData name="ambleic@clemson.edu" userId="43615028507_tp_box_2" providerId="OAuth2" clId="{5F4B9ABB-DEB5-4DC3-A8F9-1752A2D02C85}" dt="2026-07-19T04:35:40.575" v="1085" actId="20577"/>
+        <pc:sldMkLst>
+          <pc:docMk/>
+          <pc:sldMk cId="3687666995" sldId="405"/>
+        </pc:sldMkLst>
+        <pc:spChg chg="mod">
+          <ac:chgData name="ambleic@clemson.edu" userId="43615028507_tp_box_2" providerId="OAuth2" clId="{5F4B9ABB-DEB5-4DC3-A8F9-1752A2D02C85}" dt="2026-07-19T04:35:40.575" v="1085" actId="20577"/>
+          <ac:spMkLst>
+            <pc:docMk/>
+            <pc:sldMk cId="3687666995" sldId="405"/>
+            <ac:spMk id="3" creationId="{39A4178C-AE0F-47AF-7BE9-B86991376138}"/>
+          </ac:spMkLst>
+        </pc:spChg>
+      </pc:sldChg>
       <pc:sldChg chg="modSp del mod">
         <pc:chgData name="ambleic@clemson.edu" userId="43615028507_tp_box_2" providerId="OAuth2" clId="{5F4B9ABB-DEB5-4DC3-A8F9-1752A2D02C85}" dt="2026-07-18T20:02:03.368" v="228" actId="47"/>
         <pc:sldMkLst>
@@ -460,6 +476,37 @@
             <ac:spMk id="21" creationId="{3C38A973-21C1-C28F-0F8E-758B0F44D030}"/>
           </ac:spMkLst>
         </pc:spChg>
+      </pc:sldChg>
+      <pc:sldChg chg="addSp delSp modSp mod modNotesTx">
+        <pc:chgData name="ambleic@clemson.edu" userId="43615028507_tp_box_2" providerId="OAuth2" clId="{5F4B9ABB-DEB5-4DC3-A8F9-1752A2D02C85}" dt="2026-07-19T04:25:15.223" v="1080" actId="1076"/>
+        <pc:sldMkLst>
+          <pc:docMk/>
+          <pc:sldMk cId="1629276906" sldId="419"/>
+        </pc:sldMkLst>
+        <pc:picChg chg="add mod">
+          <ac:chgData name="ambleic@clemson.edu" userId="43615028507_tp_box_2" providerId="OAuth2" clId="{5F4B9ABB-DEB5-4DC3-A8F9-1752A2D02C85}" dt="2026-07-19T04:25:15.223" v="1080" actId="1076"/>
+          <ac:picMkLst>
+            <pc:docMk/>
+            <pc:sldMk cId="1629276906" sldId="419"/>
+            <ac:picMk id="3" creationId="{C9FAD540-9060-126D-3955-CA7485295114}"/>
+          </ac:picMkLst>
+        </pc:picChg>
+        <pc:picChg chg="del">
+          <ac:chgData name="ambleic@clemson.edu" userId="43615028507_tp_box_2" providerId="OAuth2" clId="{5F4B9ABB-DEB5-4DC3-A8F9-1752A2D02C85}" dt="2026-07-18T22:09:10.196" v="1073" actId="478"/>
+          <ac:picMkLst>
+            <pc:docMk/>
+            <pc:sldMk cId="1629276906" sldId="419"/>
+            <ac:picMk id="3" creationId="{EEE2FAEF-8B1B-7D63-5372-163E0D3ECF25}"/>
+          </ac:picMkLst>
+        </pc:picChg>
+        <pc:picChg chg="add del mod">
+          <ac:chgData name="ambleic@clemson.edu" userId="43615028507_tp_box_2" providerId="OAuth2" clId="{5F4B9ABB-DEB5-4DC3-A8F9-1752A2D02C85}" dt="2026-07-19T04:24:55.249" v="1076" actId="478"/>
+          <ac:picMkLst>
+            <pc:docMk/>
+            <pc:sldMk cId="1629276906" sldId="419"/>
+            <ac:picMk id="5" creationId="{279562D2-4A39-F8BF-3445-A259748F59C8}"/>
+          </ac:picMkLst>
+        </pc:picChg>
       </pc:sldChg>
       <pc:sldChg chg="del">
         <pc:chgData name="ambleic@clemson.edu" userId="43615028507_tp_box_2" providerId="OAuth2" clId="{5F4B9ABB-DEB5-4DC3-A8F9-1752A2D02C85}" dt="2026-07-18T20:01:52.163" v="223" actId="47"/>
@@ -738,7 +785,7 @@
         </pc:spChg>
       </pc:sldChg>
       <pc:sldChg chg="modSp add mod">
-        <pc:chgData name="ambleic@clemson.edu" userId="43615028507_tp_box_2" providerId="OAuth2" clId="{5F4B9ABB-DEB5-4DC3-A8F9-1752A2D02C85}" dt="2026-07-18T20:55:07.323" v="984"/>
+        <pc:chgData name="ambleic@clemson.edu" userId="43615028507_tp_box_2" providerId="OAuth2" clId="{5F4B9ABB-DEB5-4DC3-A8F9-1752A2D02C85}" dt="2026-07-19T04:36:05.101" v="1087" actId="20577"/>
         <pc:sldMkLst>
           <pc:docMk/>
           <pc:sldMk cId="3848616987" sldId="512"/>
@@ -757,6 +804,14 @@
             <pc:docMk/>
             <pc:sldMk cId="3848616987" sldId="512"/>
             <ac:spMk id="4" creationId="{CC8E3E80-482C-656F-AA63-3F6DE4553B50}"/>
+          </ac:spMkLst>
+        </pc:spChg>
+        <pc:spChg chg="mod">
+          <ac:chgData name="ambleic@clemson.edu" userId="43615028507_tp_box_2" providerId="OAuth2" clId="{5F4B9ABB-DEB5-4DC3-A8F9-1752A2D02C85}" dt="2026-07-19T04:36:05.101" v="1087" actId="20577"/>
+          <ac:spMkLst>
+            <pc:docMk/>
+            <pc:sldMk cId="3848616987" sldId="512"/>
+            <ac:spMk id="5" creationId="{EBD04F2E-E14E-03AE-5B61-7C444ED253AA}"/>
           </ac:spMkLst>
         </pc:spChg>
         <pc:spChg chg="mod">
@@ -784,7 +839,7 @@
           </ac:spMkLst>
         </pc:spChg>
         <pc:spChg chg="mod">
-          <ac:chgData name="ambleic@clemson.edu" userId="43615028507_tp_box_2" providerId="OAuth2" clId="{5F4B9ABB-DEB5-4DC3-A8F9-1752A2D02C85}" dt="2026-07-18T20:55:05.679" v="983"/>
+          <ac:chgData name="ambleic@clemson.edu" userId="43615028507_tp_box_2" providerId="OAuth2" clId="{5F4B9ABB-DEB5-4DC3-A8F9-1752A2D02C85}" dt="2026-07-19T04:35:26.425" v="1082" actId="20577"/>
           <ac:spMkLst>
             <pc:docMk/>
             <pc:sldMk cId="3848616987" sldId="512"/>
@@ -808,7 +863,7 @@
           </ac:spMkLst>
         </pc:spChg>
         <pc:spChg chg="mod">
-          <ac:chgData name="ambleic@clemson.edu" userId="43615028507_tp_box_2" providerId="OAuth2" clId="{5F4B9ABB-DEB5-4DC3-A8F9-1752A2D02C85}" dt="2026-07-18T20:55:07.323" v="984"/>
+          <ac:chgData name="ambleic@clemson.edu" userId="43615028507_tp_box_2" providerId="OAuth2" clId="{5F4B9ABB-DEB5-4DC3-A8F9-1752A2D02C85}" dt="2026-07-19T04:35:35.398" v="1084" actId="20577"/>
           <ac:spMkLst>
             <pc:docMk/>
             <pc:sldMk cId="3848616987" sldId="512"/>
@@ -974,7 +1029,7 @@
           <a:p>
             <a:fld id="{BA3813FC-438F-41C6-BA17-82A754B920B0}" type="datetimeFigureOut">
               <a:rPr lang="en-US" smtClean="0"/>
-              <a:t>7/18/2026</a:t>
+              <a:t>7/19/2026</a:t>
             </a:fld>
             <a:endParaRPr lang="en-US"/>
           </a:p>
@@ -1945,10 +2000,7 @@
           <a:bodyPr/>
           <a:lstStyle/>
           <a:p>
-            <a:r>
-              <a:rPr lang="en-US" dirty="0"/>
-              <a:t>Mention hallucinations </a:t>
-            </a:r>
+            <a:endParaRPr lang="en-US" dirty="0"/>
           </a:p>
         </p:txBody>
       </p:sp>
@@ -2132,6 +2184,90 @@
 </p:notes>
 </file>
 
+<file path=ppt/notesSlides/notesSlide9.xml><?xml version="1.0" encoding="utf-8"?>
+<p:notes xmlns:a="http://schemas.openxmlformats.org/drawingml/2006/main" xmlns:r="http://schemas.openxmlformats.org/officeDocument/2006/relationships" xmlns:p="http://schemas.openxmlformats.org/presentationml/2006/main">
+  <p:cSld>
+    <p:spTree>
+      <p:nvGrpSpPr>
+        <p:cNvPr id="1" name=""/>
+        <p:cNvGrpSpPr/>
+        <p:nvPr/>
+      </p:nvGrpSpPr>
+      <p:grpSpPr>
+        <a:xfrm>
+          <a:off x="0" y="0"/>
+          <a:ext cx="0" cy="0"/>
+          <a:chOff x="0" y="0"/>
+          <a:chExt cx="0" cy="0"/>
+        </a:xfrm>
+      </p:grpSpPr>
+      <p:sp>
+        <p:nvSpPr>
+          <p:cNvPr id="2" name="Slide Image Placeholder 1"/>
+          <p:cNvSpPr>
+            <a:spLocks noGrp="1" noRot="1" noChangeAspect="1"/>
+          </p:cNvSpPr>
+          <p:nvPr>
+            <p:ph type="sldImg"/>
+          </p:nvPr>
+        </p:nvSpPr>
+        <p:spPr/>
+      </p:sp>
+      <p:sp>
+        <p:nvSpPr>
+          <p:cNvPr id="3" name="Notes Placeholder 2"/>
+          <p:cNvSpPr>
+            <a:spLocks noGrp="1"/>
+          </p:cNvSpPr>
+          <p:nvPr>
+            <p:ph type="body" idx="1"/>
+          </p:nvPr>
+        </p:nvSpPr>
+        <p:spPr/>
+        <p:txBody>
+          <a:bodyPr/>
+          <a:lstStyle/>
+          <a:p>
+            <a:endParaRPr lang="en-US" dirty="0"/>
+          </a:p>
+        </p:txBody>
+      </p:sp>
+      <p:sp>
+        <p:nvSpPr>
+          <p:cNvPr id="4" name="Slide Number Placeholder 3"/>
+          <p:cNvSpPr>
+            <a:spLocks noGrp="1"/>
+          </p:cNvSpPr>
+          <p:nvPr>
+            <p:ph type="sldNum" sz="quarter" idx="5"/>
+          </p:nvPr>
+        </p:nvSpPr>
+        <p:spPr/>
+        <p:txBody>
+          <a:bodyPr/>
+          <a:lstStyle/>
+          <a:p>
+            <a:fld id="{9E65534A-FD8A-408B-AC34-BAC5DB966B0A}" type="slidenum">
+              <a:rPr lang="en-US" smtClean="0"/>
+              <a:t>17</a:t>
+            </a:fld>
+            <a:endParaRPr lang="en-US"/>
+          </a:p>
+        </p:txBody>
+      </p:sp>
+    </p:spTree>
+    <p:extLst>
+      <p:ext uri="{BB962C8B-B14F-4D97-AF65-F5344CB8AC3E}">
+        <p14:creationId xmlns:p14="http://schemas.microsoft.com/office/powerpoint/2010/main" val="16603778"/>
+      </p:ext>
+    </p:extLst>
+  </p:cSld>
+  <p:clrMapOvr>
+    <a:masterClrMapping/>
+  </p:clrMapOvr>
+</p:notes>
+</file>
+
 <file path=ppt/slideLayouts/slideLayout1.xml><?xml version="1.0" encoding="utf-8"?>
 <p:sldLayout xmlns:a="http://schemas.openxmlformats.org/drawingml/2006/main" xmlns:r="http://schemas.openxmlformats.org/officeDocument/2006/relationships" xmlns:p="http://schemas.openxmlformats.org/presentationml/2006/main" type="title" preserve="1">
   <p:cSld name="Title Slide">
@@ -2279,7 +2415,7 @@
           <a:p>
             <a:fld id="{01365F07-267D-4BA2-BC6C-B3B81FF729D9}" type="datetimeFigureOut">
               <a:rPr lang="en-US" smtClean="0"/>
-              <a:t>7/18/2026</a:t>
+              <a:t>7/19/2026</a:t>
             </a:fld>
             <a:endParaRPr lang="en-US"/>
           </a:p>
@@ -2477,7 +2613,7 @@
           <a:p>
             <a:fld id="{01365F07-267D-4BA2-BC6C-B3B81FF729D9}" type="datetimeFigureOut">
               <a:rPr lang="en-US" smtClean="0"/>
-              <a:t>7/18/2026</a:t>
+              <a:t>7/19/2026</a:t>
             </a:fld>
             <a:endParaRPr lang="en-US"/>
           </a:p>
@@ -2685,7 +2821,7 @@
           <a:p>
             <a:fld id="{01365F07-267D-4BA2-BC6C-B3B81FF729D9}" type="datetimeFigureOut">
               <a:rPr lang="en-US" smtClean="0"/>
-              <a:t>7/18/2026</a:t>
+              <a:t>7/19/2026</a:t>
             </a:fld>
             <a:endParaRPr lang="en-US"/>
           </a:p>
@@ -2918,7 +3054,7 @@
           <a:p>
             <a:fld id="{01365F07-267D-4BA2-BC6C-B3B81FF729D9}" type="datetimeFigureOut">
               <a:rPr lang="en-US" smtClean="0"/>
-              <a:t>7/18/2026</a:t>
+              <a:t>7/19/2026</a:t>
             </a:fld>
             <a:endParaRPr lang="en-US"/>
           </a:p>
@@ -3193,7 +3329,7 @@
           <a:p>
             <a:fld id="{01365F07-267D-4BA2-BC6C-B3B81FF729D9}" type="datetimeFigureOut">
               <a:rPr lang="en-US" smtClean="0"/>
-              <a:t>7/18/2026</a:t>
+              <a:t>7/19/2026</a:t>
             </a:fld>
             <a:endParaRPr lang="en-US"/>
           </a:p>
@@ -3458,7 +3594,7 @@
           <a:p>
             <a:fld id="{01365F07-267D-4BA2-BC6C-B3B81FF729D9}" type="datetimeFigureOut">
               <a:rPr lang="en-US" smtClean="0"/>
-              <a:t>7/18/2026</a:t>
+              <a:t>7/19/2026</a:t>
             </a:fld>
             <a:endParaRPr lang="en-US"/>
           </a:p>
@@ -3870,7 +4006,7 @@
           <a:p>
             <a:fld id="{01365F07-267D-4BA2-BC6C-B3B81FF729D9}" type="datetimeFigureOut">
               <a:rPr lang="en-US" smtClean="0"/>
-              <a:t>7/18/2026</a:t>
+              <a:t>7/19/2026</a:t>
             </a:fld>
             <a:endParaRPr lang="en-US"/>
           </a:p>
@@ -4011,7 +4147,7 @@
           <a:p>
             <a:fld id="{01365F07-267D-4BA2-BC6C-B3B81FF729D9}" type="datetimeFigureOut">
               <a:rPr lang="en-US" smtClean="0"/>
-              <a:t>7/18/2026</a:t>
+              <a:t>7/19/2026</a:t>
             </a:fld>
             <a:endParaRPr lang="en-US"/>
           </a:p>
@@ -4124,7 +4260,7 @@
           <a:p>
             <a:fld id="{01365F07-267D-4BA2-BC6C-B3B81FF729D9}" type="datetimeFigureOut">
               <a:rPr lang="en-US" smtClean="0"/>
-              <a:t>7/18/2026</a:t>
+              <a:t>7/19/2026</a:t>
             </a:fld>
             <a:endParaRPr lang="en-US"/>
           </a:p>
@@ -4435,7 +4571,7 @@
           <a:p>
             <a:fld id="{01365F07-267D-4BA2-BC6C-B3B81FF729D9}" type="datetimeFigureOut">
               <a:rPr lang="en-US" smtClean="0"/>
-              <a:t>7/18/2026</a:t>
+              <a:t>7/19/2026</a:t>
             </a:fld>
             <a:endParaRPr lang="en-US"/>
           </a:p>
@@ -4723,7 +4859,7 @@
           <a:p>
             <a:fld id="{01365F07-267D-4BA2-BC6C-B3B81FF729D9}" type="datetimeFigureOut">
               <a:rPr lang="en-US" smtClean="0"/>
-              <a:t>7/18/2026</a:t>
+              <a:t>7/19/2026</a:t>
             </a:fld>
             <a:endParaRPr lang="en-US"/>
           </a:p>
@@ -4964,7 +5100,7 @@
           <a:p>
             <a:fld id="{01365F07-267D-4BA2-BC6C-B3B81FF729D9}" type="datetimeFigureOut">
               <a:rPr lang="en-US" smtClean="0"/>
-              <a:t>7/18/2026</a:t>
+              <a:t>7/19/2026</a:t>
             </a:fld>
             <a:endParaRPr lang="en-US"/>
           </a:p>
@@ -5467,7 +5603,7 @@
                 <a:latin typeface="Arial" panose="020B0604020202020204" pitchFamily="34" charset="0"/>
                 <a:cs typeface="Arial" panose="020B0604020202020204" pitchFamily="34" charset="0"/>
               </a:rPr>
-              <a:t>A Human – AI Teaming Approach to Infectious Disease Modeling</a:t>
+              <a:t>A Human-AI Teaming Approach to Infectious Disease Modeling</a:t>
             </a:r>
           </a:p>
           <a:p>
@@ -5576,7 +5712,7 @@
                 <a:ea typeface="Calibri" pitchFamily="34" charset="-122"/>
                 <a:cs typeface="Arial" panose="020B0604020202020204" pitchFamily="34" charset="0"/>
               </a:rPr>
-              <a:t>This activity will require two prompts: One to build the agent and one to generate code.</a:t>
+              <a:t>This activity will require two prompts: one to build the agent and one to generate code.</a:t>
             </a:r>
             <a:endParaRPr lang="en-US" sz="2000" dirty="0">
               <a:latin typeface="Arial" panose="020B0604020202020204" pitchFamily="34" charset="0"/>
@@ -6963,7 +7099,7 @@
                 <a:ea typeface="Calibri" pitchFamily="34" charset="-122"/>
                 <a:cs typeface="Arial" panose="020B0604020202020204" pitchFamily="34" charset="0"/>
               </a:rPr>
-              <a:t>Open the project folder and double check that it contains </a:t>
+              <a:t>Open the project folder and double-check that it contains </a:t>
             </a:r>
             <a:r>
               <a:rPr lang="en-US" sz="2000" i="1" dirty="0">
@@ -7556,7 +7692,7 @@
                 <a:ea typeface="Calibri" pitchFamily="34" charset="-122"/>
                 <a:cs typeface="Arial" panose="020B0604020202020204" pitchFamily="34" charset="0"/>
               </a:rPr>
-              <a:t> prompt from Slide 9).</a:t>
+              <a:t> prompt from Slide 10).</a:t>
             </a:r>
             <a:endParaRPr kumimoji="0" lang="en-US" sz="2000" b="1" i="0" u="none" strike="noStrike" kern="1200" cap="none" spc="0" normalizeH="0" baseline="0" noProof="0" dirty="0">
               <a:ln>
@@ -7907,7 +8043,7 @@
                 <a:ea typeface="Calibri" pitchFamily="34" charset="-122"/>
                 <a:cs typeface="Arial" panose="020B0604020202020204" pitchFamily="34" charset="0"/>
               </a:rPr>
-              <a:t> prompt from Slide 9).</a:t>
+              <a:t> prompt from Slide 10).</a:t>
             </a:r>
             <a:endParaRPr kumimoji="0" lang="en-US" sz="2000" b="0" i="1" u="none" strike="noStrike" kern="1200" cap="none" spc="0" normalizeH="0" baseline="0" noProof="0" dirty="0">
               <a:ln>
@@ -9692,36 +9828,6 @@
           <a:chExt cx="0" cy="0"/>
         </a:xfrm>
       </p:grpSpPr>
-      <p:pic>
-        <p:nvPicPr>
-          <p:cNvPr id="3" name="Picture 2">
-            <a:extLst>
-              <a:ext uri="{FF2B5EF4-FFF2-40B4-BE49-F238E27FC236}">
-                <a16:creationId xmlns:a16="http://schemas.microsoft.com/office/drawing/2014/main" id="{EEE2FAEF-8B1B-7D63-5372-163E0D3ECF25}"/>
-              </a:ext>
-            </a:extLst>
-          </p:cNvPr>
-          <p:cNvPicPr>
-            <a:picLocks noChangeAspect="1"/>
-          </p:cNvPicPr>
-          <p:nvPr/>
-        </p:nvPicPr>
-        <p:blipFill>
-          <a:blip r:embed="rId2"/>
-          <a:stretch>
-            <a:fillRect/>
-          </a:stretch>
-        </p:blipFill>
-        <p:spPr>
-          <a:xfrm>
-            <a:off x="1199899" y="1095538"/>
-            <a:ext cx="9792202" cy="5595544"/>
-          </a:xfrm>
-          <a:prstGeom prst="rect">
-            <a:avLst/>
-          </a:prstGeom>
-        </p:spPr>
-      </p:pic>
       <p:sp>
         <p:nvSpPr>
           <p:cNvPr id="4" name="Text 0">
@@ -9780,6 +9886,42 @@
           </a:p>
         </p:txBody>
       </p:sp>
+      <p:pic>
+        <p:nvPicPr>
+          <p:cNvPr id="3" name="Picture 2">
+            <a:extLst>
+              <a:ext uri="{FF2B5EF4-FFF2-40B4-BE49-F238E27FC236}">
+                <a16:creationId xmlns:a16="http://schemas.microsoft.com/office/drawing/2014/main" id="{C9FAD540-9060-126D-3955-CA7485295114}"/>
+              </a:ext>
+            </a:extLst>
+          </p:cNvPr>
+          <p:cNvPicPr>
+            <a:picLocks noChangeAspect="1"/>
+          </p:cNvPicPr>
+          <p:nvPr/>
+        </p:nvPicPr>
+        <p:blipFill>
+          <a:blip r:embed="rId3">
+            <a:extLst>
+              <a:ext uri="{28A0092B-C50C-407E-A947-70E740481C1C}">
+                <a14:useLocalDpi xmlns:a14="http://schemas.microsoft.com/office/drawing/2010/main" val="0"/>
+              </a:ext>
+            </a:extLst>
+          </a:blip>
+          <a:stretch>
+            <a:fillRect/>
+          </a:stretch>
+        </p:blipFill>
+        <p:spPr>
+          <a:xfrm>
+            <a:off x="764850" y="1170234"/>
+            <a:ext cx="10662300" cy="5331150"/>
+          </a:xfrm>
+          <a:prstGeom prst="rect">
+            <a:avLst/>
+          </a:prstGeom>
+        </p:spPr>
+      </p:pic>
     </p:spTree>
     <p:extLst>
       <p:ext uri="{BB962C8B-B14F-4D97-AF65-F5344CB8AC3E}">
